--- a/docs/Valentin-Architecture-v6.pptx
+++ b/docs/Valentin-Architecture-v6.pptx
@@ -502,25 +502,31 @@
           <a:lstStyle/>
           <a:p>
             <a:r>
-              <a:t>[1:00 · Architecture] One product, two engines. Everything on the left is held fixed: the browser talks to CloudFront, which serves the React app out of S3 and sends /api/* and /ws to the ALB. The ALB is the fork.</a:t>
+              <a:t>[1:20 · Architecture] One product, two engines. The left is held fixed: the browser talks to CloudFront, which serves the React app out of S3 and sends /api/* and /ws to the ALB. The ALB is the fork.</a:t>
             </a:r>
           </a:p>
           <a:p/>
           <a:p>
             <a:r>
-              <a:t>Up and to the right is engine A — the glue code I wrote. One Fargate service, valentin-service-dev, calls Bedrock directly and keeps preferences in DynamoDB.</a:t>
+              <a:t>Up and to the right is engine A — the glue code I wrote. One Fargate service calls Bedrock directly and runs a hand-written extractor.</a:t>
             </a:r>
           </a:p>
           <a:p/>
           <a:p>
             <a:r>
-              <a:t>Down and to the right is engine B — the same product on Amazon Bedrock AgentCore. A thin Fargate proxy, valentin-ac-proxy-dev, hands the turn to the AgentCore Runtime valentin_agent_dev, which uses AgentCore Memory for preferences, Gateway to reach the profile-tools Lambda over MCP with CUSTOM_JWT, and Observability for session traces.</a:t>
+              <a:t>Along the bottom is engine B — the same product on Amazon Bedrock AgentCore. A thin Fargate proxy hands the turn to the AgentCore Runtime, which uses Memory for extraction, Gateway to reach the profile-tools Lambda over MCP, and Observability for session traces.</a:t>
             </a:r>
           </a:p>
           <a:p/>
           <a:p>
             <a:r>
-              <a:t>Both engines call the same model, Claude Sonnet 4.5, and both report into one CloudWatch dashboard. Only the two dashed regions differ — and the four decisions inside them are the next four slides.</a:t>
+              <a:t>The column on the right is what neither engine owns. Both call the same model. Both report into one CloudWatch dashboard. And both write the same table — the tinted card, because people assume the database belongs to engine A. It does not. It stays the source of truth for the profile either way: engine A writes it directly, and on engine B whatever Memory extracts is mirrored into it after every turn. So the profile UI works unchanged on both.</a:t>
+            </a:r>
+          </a:p>
+          <a:p/>
+          <a:p>
+            <a:r>
+              <a:t>Only the two dashed regions differ — and the four decisions inside them are the next four slides.</a:t>
             </a:r>
           </a:p>
         </p:txBody>
@@ -3693,7 +3699,7 @@
         <p:spPr>
           <a:xfrm>
             <a:off x="384048" y="1133856"/>
-            <a:ext cx="4206240" cy="237744"/>
+            <a:ext cx="4160520" cy="237744"/>
           </a:xfrm>
           <a:prstGeom prst="rect">
             <a:avLst/>
@@ -3727,8 +3733,8 @@
         </p:nvSpPr>
         <p:spPr>
           <a:xfrm>
-            <a:off x="5084064" y="1133856"/>
-            <a:ext cx="3008376" cy="237744"/>
+            <a:off x="4672584" y="1133856"/>
+            <a:ext cx="3099816" cy="237744"/>
           </a:xfrm>
           <a:prstGeom prst="rect">
             <a:avLst/>
@@ -3762,8 +3768,8 @@
         </p:nvSpPr>
         <p:spPr>
           <a:xfrm>
-            <a:off x="8220456" y="1133856"/>
-            <a:ext cx="3611880" cy="237744"/>
+            <a:off x="8138160" y="1133856"/>
+            <a:ext cx="3694176" cy="237744"/>
           </a:xfrm>
           <a:prstGeom prst="rect">
             <a:avLst/>
@@ -3797,8 +3803,8 @@
         </p:nvSpPr>
         <p:spPr>
           <a:xfrm>
-            <a:off x="8778240" y="3621024"/>
-            <a:ext cx="3054096" cy="237744"/>
+            <a:off x="384048" y="4069080"/>
+            <a:ext cx="2926080" cy="237744"/>
           </a:xfrm>
           <a:prstGeom prst="rect">
             <a:avLst/>
@@ -3811,7 +3817,7 @@
           </a:bodyPr>
           <a:lstStyle/>
           <a:p>
-            <a:pPr algn="r"/>
+            <a:pPr algn="l"/>
             <a:r>
               <a:rPr sz="1400" b="1">
                 <a:solidFill>
@@ -3833,11 +3839,11 @@
         <p:spPr>
           <a:xfrm>
             <a:off x="384048" y="1389888"/>
-            <a:ext cx="4572000" cy="2139696"/>
+            <a:ext cx="4160520" cy="1709928"/>
           </a:xfrm>
           <a:prstGeom prst="roundRect">
             <a:avLst>
-              <a:gd name="adj" fmla="val 3418"/>
+              <a:gd name="adj" fmla="val 4278"/>
             </a:avLst>
           </a:prstGeom>
           <a:noFill/>
@@ -3878,12 +3884,12 @@
         </p:nvSpPr>
         <p:spPr>
           <a:xfrm>
-            <a:off x="5084064" y="1389888"/>
-            <a:ext cx="3008376" cy="2139696"/>
+            <a:off x="4672584" y="1389888"/>
+            <a:ext cx="3099816" cy="850391"/>
           </a:xfrm>
           <a:prstGeom prst="roundRect">
             <a:avLst>
-              <a:gd name="adj" fmla="val 3418"/>
+              <a:gd name="adj" fmla="val 8602"/>
             </a:avLst>
           </a:prstGeom>
           <a:noFill/>
@@ -3925,12 +3931,12 @@
         </p:nvSpPr>
         <p:spPr>
           <a:xfrm>
-            <a:off x="8220456" y="1389888"/>
-            <a:ext cx="3611880" cy="2139696"/>
+            <a:off x="8138160" y="1389888"/>
+            <a:ext cx="3694176" cy="2569464"/>
           </a:xfrm>
           <a:prstGeom prst="roundRect">
             <a:avLst>
-              <a:gd name="adj" fmla="val 3418"/>
+              <a:gd name="adj" fmla="val 2846"/>
             </a:avLst>
           </a:prstGeom>
           <a:noFill/>
@@ -3971,12 +3977,12 @@
         </p:nvSpPr>
         <p:spPr>
           <a:xfrm>
-            <a:off x="384048" y="3877056"/>
-            <a:ext cx="11448288" cy="2084831"/>
+            <a:off x="384048" y="4325112"/>
+            <a:ext cx="11448288" cy="1609343"/>
           </a:xfrm>
           <a:prstGeom prst="roundRect">
             <a:avLst>
-              <a:gd name="adj" fmla="val 3508"/>
+              <a:gd name="adj" fmla="val 4545"/>
             </a:avLst>
           </a:prstGeom>
           <a:noFill/>
@@ -4018,12 +4024,12 @@
         </p:nvSpPr>
         <p:spPr>
           <a:xfrm>
-            <a:off x="530352" y="1536192"/>
-            <a:ext cx="1920240" cy="804672"/>
+            <a:off x="484632" y="1517904"/>
+            <a:ext cx="1915668" cy="621792"/>
           </a:xfrm>
           <a:prstGeom prst="roundRect">
             <a:avLst>
-              <a:gd name="adj" fmla="val 9090"/>
+              <a:gd name="adj" fmla="val 11764"/>
             </a:avLst>
           </a:prstGeom>
           <a:solidFill>
@@ -4074,8 +4080,8 @@
         </p:blipFill>
         <p:spPr>
           <a:xfrm>
-            <a:off x="649224" y="1728216"/>
-            <a:ext cx="420624" cy="420624"/>
+            <a:off x="585216" y="1636776"/>
+            <a:ext cx="384048" cy="384048"/>
           </a:xfrm>
           <a:prstGeom prst="rect">
             <a:avLst/>
@@ -4090,8 +4096,8 @@
         </p:nvSpPr>
         <p:spPr>
           <a:xfrm>
-            <a:off x="1179576" y="1655064"/>
-            <a:ext cx="1179576" cy="256032"/>
+            <a:off x="1069848" y="1572768"/>
+            <a:ext cx="1248156" cy="246888"/>
           </a:xfrm>
           <a:prstGeom prst="rect">
             <a:avLst/>
@@ -4125,8 +4131,8 @@
         </p:nvSpPr>
         <p:spPr>
           <a:xfrm>
-            <a:off x="1179576" y="1929384"/>
-            <a:ext cx="1179576" cy="310896"/>
+            <a:off x="1069848" y="1828800"/>
+            <a:ext cx="1248156" cy="274320"/>
           </a:xfrm>
           <a:prstGeom prst="rect">
             <a:avLst/>
@@ -4160,12 +4166,12 @@
         </p:nvSpPr>
         <p:spPr>
           <a:xfrm>
-            <a:off x="2852928" y="1536192"/>
-            <a:ext cx="1920240" cy="804672"/>
+            <a:off x="2528316" y="1517904"/>
+            <a:ext cx="1915668" cy="621792"/>
           </a:xfrm>
           <a:prstGeom prst="roundRect">
             <a:avLst>
-              <a:gd name="adj" fmla="val 9090"/>
+              <a:gd name="adj" fmla="val 11764"/>
             </a:avLst>
           </a:prstGeom>
           <a:solidFill>
@@ -4216,8 +4222,8 @@
         </p:blipFill>
         <p:spPr>
           <a:xfrm>
-            <a:off x="2971800" y="1728216"/>
-            <a:ext cx="420624" cy="420624"/>
+            <a:off x="2628900" y="1636776"/>
+            <a:ext cx="384048" cy="384048"/>
           </a:xfrm>
           <a:prstGeom prst="rect">
             <a:avLst/>
@@ -4232,8 +4238,8 @@
         </p:nvSpPr>
         <p:spPr>
           <a:xfrm>
-            <a:off x="3502152" y="1655064"/>
-            <a:ext cx="1179576" cy="256032"/>
+            <a:off x="3113532" y="1572768"/>
+            <a:ext cx="1248156" cy="246888"/>
           </a:xfrm>
           <a:prstGeom prst="rect">
             <a:avLst/>
@@ -4267,8 +4273,8 @@
         </p:nvSpPr>
         <p:spPr>
           <a:xfrm>
-            <a:off x="3502152" y="1929384"/>
-            <a:ext cx="1179576" cy="310896"/>
+            <a:off x="3113532" y="1828800"/>
+            <a:ext cx="1248156" cy="274320"/>
           </a:xfrm>
           <a:prstGeom prst="rect">
             <a:avLst/>
@@ -4302,12 +4308,12 @@
         </p:nvSpPr>
         <p:spPr>
           <a:xfrm>
-            <a:off x="530352" y="2615184"/>
-            <a:ext cx="1920240" cy="804672"/>
+            <a:off x="484632" y="2377440"/>
+            <a:ext cx="1915668" cy="621792"/>
           </a:xfrm>
           <a:prstGeom prst="roundRect">
             <a:avLst>
-              <a:gd name="adj" fmla="val 9090"/>
+              <a:gd name="adj" fmla="val 11764"/>
             </a:avLst>
           </a:prstGeom>
           <a:solidFill>
@@ -4358,8 +4364,8 @@
         </p:blipFill>
         <p:spPr>
           <a:xfrm>
-            <a:off x="649224" y="2807208"/>
-            <a:ext cx="420624" cy="420624"/>
+            <a:off x="585216" y="2496312"/>
+            <a:ext cx="384048" cy="384048"/>
           </a:xfrm>
           <a:prstGeom prst="rect">
             <a:avLst/>
@@ -4374,8 +4380,8 @@
         </p:nvSpPr>
         <p:spPr>
           <a:xfrm>
-            <a:off x="1179576" y="2734056"/>
-            <a:ext cx="1179576" cy="256032"/>
+            <a:off x="1069848" y="2432304"/>
+            <a:ext cx="1248156" cy="246888"/>
           </a:xfrm>
           <a:prstGeom prst="rect">
             <a:avLst/>
@@ -4409,8 +4415,8 @@
         </p:nvSpPr>
         <p:spPr>
           <a:xfrm>
-            <a:off x="1179576" y="3008376"/>
-            <a:ext cx="1179576" cy="310896"/>
+            <a:off x="1069848" y="2688336"/>
+            <a:ext cx="1248156" cy="274320"/>
           </a:xfrm>
           <a:prstGeom prst="rect">
             <a:avLst/>
@@ -4431,7 +4437,7 @@
                 </a:solidFill>
                 <a:latin typeface="Calibri"/>
               </a:rPr>
-              <a:t>static assets</a:t>
+              <a:t>app bundle</a:t>
             </a:r>
           </a:p>
         </p:txBody>
@@ -4444,12 +4450,12 @@
         </p:nvSpPr>
         <p:spPr>
           <a:xfrm>
-            <a:off x="2852928" y="2615184"/>
-            <a:ext cx="1920240" cy="804672"/>
+            <a:off x="2528316" y="2377440"/>
+            <a:ext cx="1915668" cy="621792"/>
           </a:xfrm>
           <a:prstGeom prst="roundRect">
             <a:avLst>
-              <a:gd name="adj" fmla="val 9090"/>
+              <a:gd name="adj" fmla="val 11764"/>
             </a:avLst>
           </a:prstGeom>
           <a:solidFill>
@@ -4500,8 +4506,8 @@
         </p:blipFill>
         <p:spPr>
           <a:xfrm>
-            <a:off x="2971800" y="2807208"/>
-            <a:ext cx="420624" cy="420624"/>
+            <a:off x="2628900" y="2496312"/>
+            <a:ext cx="384048" cy="384048"/>
           </a:xfrm>
           <a:prstGeom prst="rect">
             <a:avLst/>
@@ -4516,8 +4522,8 @@
         </p:nvSpPr>
         <p:spPr>
           <a:xfrm>
-            <a:off x="3502152" y="2734056"/>
-            <a:ext cx="1179576" cy="256032"/>
+            <a:off x="3113532" y="2432304"/>
+            <a:ext cx="1248156" cy="246888"/>
           </a:xfrm>
           <a:prstGeom prst="rect">
             <a:avLst/>
@@ -4551,8 +4557,8 @@
         </p:nvSpPr>
         <p:spPr>
           <a:xfrm>
-            <a:off x="3502152" y="3008376"/>
-            <a:ext cx="1179576" cy="310896"/>
+            <a:off x="3113532" y="2688336"/>
+            <a:ext cx="1248156" cy="274320"/>
           </a:xfrm>
           <a:prstGeom prst="rect">
             <a:avLst/>
@@ -4586,12 +4592,12 @@
         </p:nvSpPr>
         <p:spPr>
           <a:xfrm>
-            <a:off x="5230368" y="1536192"/>
-            <a:ext cx="2715768" cy="804672"/>
+            <a:off x="4773168" y="1517904"/>
+            <a:ext cx="2898648" cy="621792"/>
           </a:xfrm>
           <a:prstGeom prst="roundRect">
             <a:avLst>
-              <a:gd name="adj" fmla="val 9090"/>
+              <a:gd name="adj" fmla="val 11764"/>
             </a:avLst>
           </a:prstGeom>
           <a:solidFill>
@@ -4642,8 +4648,8 @@
         </p:blipFill>
         <p:spPr>
           <a:xfrm>
-            <a:off x="5349240" y="1728216"/>
-            <a:ext cx="420624" cy="420624"/>
+            <a:off x="4873752" y="1636776"/>
+            <a:ext cx="384048" cy="384048"/>
           </a:xfrm>
           <a:prstGeom prst="rect">
             <a:avLst/>
@@ -4658,8 +4664,8 @@
         </p:nvSpPr>
         <p:spPr>
           <a:xfrm>
-            <a:off x="5879592" y="1655064"/>
-            <a:ext cx="1975104" cy="256032"/>
+            <a:off x="5358384" y="1572768"/>
+            <a:ext cx="2231135" cy="246888"/>
           </a:xfrm>
           <a:prstGeom prst="rect">
             <a:avLst/>
@@ -4693,8 +4699,8 @@
         </p:nvSpPr>
         <p:spPr>
           <a:xfrm>
-            <a:off x="5879592" y="1929384"/>
-            <a:ext cx="1975104" cy="310896"/>
+            <a:off x="5358384" y="1828800"/>
+            <a:ext cx="2231135" cy="274320"/>
           </a:xfrm>
           <a:prstGeom prst="rect">
             <a:avLst/>
@@ -4728,12 +4734,12 @@
         </p:nvSpPr>
         <p:spPr>
           <a:xfrm>
-            <a:off x="5230368" y="2615184"/>
-            <a:ext cx="2715768" cy="804672"/>
+            <a:off x="8238744" y="1517904"/>
+            <a:ext cx="3493008" cy="621792"/>
           </a:xfrm>
           <a:prstGeom prst="roundRect">
             <a:avLst>
-              <a:gd name="adj" fmla="val 9090"/>
+              <a:gd name="adj" fmla="val 11764"/>
             </a:avLst>
           </a:prstGeom>
           <a:solidFill>
@@ -4770,7 +4776,7 @@
       </p:sp>
       <p:pic>
         <p:nvPicPr>
-          <p:cNvPr id="35" name="Picture 34" descr="DynamoDB icon"/>
+          <p:cNvPr id="35" name="Picture 34" descr="Bedrock icon"/>
           <p:cNvPicPr>
             <a:picLocks noChangeAspect="1"/>
           </p:cNvPicPr>
@@ -4784,8 +4790,8 @@
         </p:blipFill>
         <p:spPr>
           <a:xfrm>
-            <a:off x="5349240" y="2807208"/>
-            <a:ext cx="420624" cy="420624"/>
+            <a:off x="8339327" y="1636776"/>
+            <a:ext cx="384048" cy="384048"/>
           </a:xfrm>
           <a:prstGeom prst="rect">
             <a:avLst/>
@@ -4800,8 +4806,8 @@
         </p:nvSpPr>
         <p:spPr>
           <a:xfrm>
-            <a:off x="5879592" y="2734056"/>
-            <a:ext cx="1975104" cy="256032"/>
+            <a:off x="8823959" y="1572768"/>
+            <a:ext cx="2825496" cy="246888"/>
           </a:xfrm>
           <a:prstGeom prst="rect">
             <a:avLst/>
@@ -4822,7 +4828,7 @@
                 </a:solidFill>
                 <a:latin typeface="Calibri"/>
               </a:rPr>
-              <a:t>DynamoDB</a:t>
+              <a:t>Bedrock</a:t>
             </a:r>
           </a:p>
         </p:txBody>
@@ -4835,8 +4841,8 @@
         </p:nvSpPr>
         <p:spPr>
           <a:xfrm>
-            <a:off x="5879592" y="3008376"/>
-            <a:ext cx="1975104" cy="310896"/>
+            <a:off x="8823959" y="1828800"/>
+            <a:ext cx="2825496" cy="274320"/>
           </a:xfrm>
           <a:prstGeom prst="rect">
             <a:avLst/>
@@ -4857,7 +4863,7 @@
                 </a:solidFill>
                 <a:latin typeface="Calibri"/>
               </a:rPr>
-              <a:t>ValentinTable-dev</a:t>
+              <a:t>Claude Sonnet 4.5</a:t>
             </a:r>
           </a:p>
         </p:txBody>
@@ -4870,12 +4876,12 @@
         </p:nvSpPr>
         <p:spPr>
           <a:xfrm>
-            <a:off x="8366760" y="1536192"/>
-            <a:ext cx="3319272" cy="804672"/>
+            <a:off x="8238744" y="2377440"/>
+            <a:ext cx="3493008" cy="621792"/>
           </a:xfrm>
           <a:prstGeom prst="roundRect">
             <a:avLst>
-              <a:gd name="adj" fmla="val 9090"/>
+              <a:gd name="adj" fmla="val 11764"/>
             </a:avLst>
           </a:prstGeom>
           <a:solidFill>
@@ -4912,7 +4918,7 @@
       </p:sp>
       <p:pic>
         <p:nvPicPr>
-          <p:cNvPr id="39" name="Picture 38" descr="Bedrock icon"/>
+          <p:cNvPr id="39" name="Picture 38" descr="CloudWatch icon"/>
           <p:cNvPicPr>
             <a:picLocks noChangeAspect="1"/>
           </p:cNvPicPr>
@@ -4926,8 +4932,8 @@
         </p:blipFill>
         <p:spPr>
           <a:xfrm>
-            <a:off x="8485632" y="1728216"/>
-            <a:ext cx="420624" cy="420624"/>
+            <a:off x="8339327" y="2496312"/>
+            <a:ext cx="384048" cy="384048"/>
           </a:xfrm>
           <a:prstGeom prst="rect">
             <a:avLst/>
@@ -4942,8 +4948,8 @@
         </p:nvSpPr>
         <p:spPr>
           <a:xfrm>
-            <a:off x="9015984" y="1655064"/>
-            <a:ext cx="2578607" cy="256032"/>
+            <a:off x="8823959" y="2432304"/>
+            <a:ext cx="2825496" cy="246888"/>
           </a:xfrm>
           <a:prstGeom prst="rect">
             <a:avLst/>
@@ -4964,7 +4970,7 @@
                 </a:solidFill>
                 <a:latin typeface="Calibri"/>
               </a:rPr>
-              <a:t>Bedrock</a:t>
+              <a:t>CloudWatch</a:t>
             </a:r>
           </a:p>
         </p:txBody>
@@ -4977,8 +4983,8 @@
         </p:nvSpPr>
         <p:spPr>
           <a:xfrm>
-            <a:off x="9015984" y="1929384"/>
-            <a:ext cx="2578607" cy="310896"/>
+            <a:off x="8823959" y="2688336"/>
+            <a:ext cx="2825496" cy="274320"/>
           </a:xfrm>
           <a:prstGeom prst="rect">
             <a:avLst/>
@@ -4999,7 +5005,7 @@
                 </a:solidFill>
                 <a:latin typeface="Calibri"/>
               </a:rPr>
-              <a:t>Claude Sonnet 4.5</a:t>
+              <a:t>one dashboard, both engines</a:t>
             </a:r>
           </a:p>
         </p:txBody>
@@ -5012,12 +5018,154 @@
         </p:nvSpPr>
         <p:spPr>
           <a:xfrm>
-            <a:off x="8366760" y="2615184"/>
-            <a:ext cx="3319272" cy="804672"/>
+            <a:off x="8238744" y="3236976"/>
+            <a:ext cx="3493008" cy="621792"/>
           </a:xfrm>
           <a:prstGeom prst="roundRect">
             <a:avLst>
-              <a:gd name="adj" fmla="val 9090"/>
+              <a:gd name="adj" fmla="val 11764"/>
+            </a:avLst>
+          </a:prstGeom>
+          <a:solidFill>
+            <a:srgbClr val="FFEFD6"/>
+          </a:solidFill>
+          <a:ln w="12700">
+            <a:solidFill>
+              <a:srgbClr val="FF9900"/>
+            </a:solidFill>
+          </a:ln>
+          <a:effectLst/>
+        </p:spPr>
+        <p:style>
+          <a:lnRef idx="1">
+            <a:schemeClr val="accent1"/>
+          </a:lnRef>
+          <a:fillRef idx="3">
+            <a:schemeClr val="accent1"/>
+          </a:fillRef>
+          <a:effectRef idx="2">
+            <a:schemeClr val="accent1"/>
+          </a:effectRef>
+          <a:fontRef idx="minor">
+            <a:schemeClr val="lt1"/>
+          </a:fontRef>
+        </p:style>
+        <p:txBody>
+          <a:bodyPr rtlCol="0" anchor="ctr"/>
+          <a:lstStyle/>
+          <a:p>
+            <a:pPr algn="ctr"/>
+          </a:p>
+        </p:txBody>
+      </p:sp>
+      <p:pic>
+        <p:nvPicPr>
+          <p:cNvPr id="43" name="Picture 42" descr="DynamoDB icon"/>
+          <p:cNvPicPr>
+            <a:picLocks noChangeAspect="1"/>
+          </p:cNvPicPr>
+          <p:nvPr/>
+        </p:nvPicPr>
+        <p:blipFill>
+          <a:blip r:embed="rId9"/>
+          <a:stretch>
+            <a:fillRect/>
+          </a:stretch>
+        </p:blipFill>
+        <p:spPr>
+          <a:xfrm>
+            <a:off x="8339327" y="3355848"/>
+            <a:ext cx="384048" cy="384048"/>
+          </a:xfrm>
+          <a:prstGeom prst="rect">
+            <a:avLst/>
+          </a:prstGeom>
+        </p:spPr>
+      </p:pic>
+      <p:sp>
+        <p:nvSpPr>
+          <p:cNvPr id="44" name="TextBox 43"/>
+          <p:cNvSpPr txBox="1"/>
+          <p:nvPr/>
+        </p:nvSpPr>
+        <p:spPr>
+          <a:xfrm>
+            <a:off x="8823959" y="3291840"/>
+            <a:ext cx="2825496" cy="246888"/>
+          </a:xfrm>
+          <a:prstGeom prst="rect">
+            <a:avLst/>
+          </a:prstGeom>
+          <a:noFill/>
+        </p:spPr>
+        <p:txBody>
+          <a:bodyPr wrap="square" lIns="0" rIns="0" tIns="0" bIns="0" anchor="t">
+            <a:spAutoFit/>
+          </a:bodyPr>
+          <a:lstStyle/>
+          <a:p>
+            <a:pPr algn="l"/>
+            <a:r>
+              <a:rPr sz="1500" b="1">
+                <a:solidFill>
+                  <a:srgbClr val="232F3E"/>
+                </a:solidFill>
+                <a:latin typeface="Calibri"/>
+              </a:rPr>
+              <a:t>DynamoDB</a:t>
+            </a:r>
+          </a:p>
+        </p:txBody>
+      </p:sp>
+      <p:sp>
+        <p:nvSpPr>
+          <p:cNvPr id="45" name="TextBox 44"/>
+          <p:cNvSpPr txBox="1"/>
+          <p:nvPr/>
+        </p:nvSpPr>
+        <p:spPr>
+          <a:xfrm>
+            <a:off x="8823959" y="3547872"/>
+            <a:ext cx="2825496" cy="274320"/>
+          </a:xfrm>
+          <a:prstGeom prst="rect">
+            <a:avLst/>
+          </a:prstGeom>
+          <a:noFill/>
+        </p:spPr>
+        <p:txBody>
+          <a:bodyPr wrap="square" lIns="0" rIns="0" tIns="0" bIns="0" anchor="t">
+            <a:spAutoFit/>
+          </a:bodyPr>
+          <a:lstStyle/>
+          <a:p>
+            <a:pPr algn="l"/>
+            <a:r>
+              <a:rPr sz="1400" b="0">
+                <a:solidFill>
+                  <a:srgbClr val="545B64"/>
+                </a:solidFill>
+                <a:latin typeface="Calibri"/>
+              </a:rPr>
+              <a:t>ValentinTable-dev · shared</a:t>
+            </a:r>
+          </a:p>
+        </p:txBody>
+      </p:sp>
+      <p:sp>
+        <p:nvSpPr>
+          <p:cNvPr id="46" name="Rounded Rectangle 45"/>
+          <p:cNvSpPr/>
+          <p:nvPr/>
+        </p:nvSpPr>
+        <p:spPr>
+          <a:xfrm>
+            <a:off x="484632" y="4425696"/>
+            <a:ext cx="3664000" cy="621792"/>
+          </a:xfrm>
+          <a:prstGeom prst="roundRect">
+            <a:avLst>
+              <a:gd name="adj" fmla="val 11764"/>
             </a:avLst>
           </a:prstGeom>
           <a:solidFill>
@@ -5054,22 +5202,22 @@
       </p:sp>
       <p:pic>
         <p:nvPicPr>
-          <p:cNvPr id="43" name="Picture 42" descr="CloudWatch icon"/>
+          <p:cNvPr id="47" name="Picture 46" descr="Fargate icon"/>
           <p:cNvPicPr>
             <a:picLocks noChangeAspect="1"/>
           </p:cNvPicPr>
           <p:nvPr/>
         </p:nvPicPr>
         <p:blipFill>
-          <a:blip r:embed="rId9"/>
+          <a:blip r:embed="rId6"/>
           <a:stretch>
             <a:fillRect/>
           </a:stretch>
         </p:blipFill>
         <p:spPr>
           <a:xfrm>
-            <a:off x="8485632" y="2807208"/>
-            <a:ext cx="420624" cy="420624"/>
+            <a:off x="585216" y="4544568"/>
+            <a:ext cx="384048" cy="384048"/>
           </a:xfrm>
           <a:prstGeom prst="rect">
             <a:avLst/>
@@ -5078,14 +5226,14 @@
       </p:pic>
       <p:sp>
         <p:nvSpPr>
-          <p:cNvPr id="44" name="TextBox 43"/>
+          <p:cNvPr id="48" name="TextBox 47"/>
           <p:cNvSpPr txBox="1"/>
           <p:nvPr/>
         </p:nvSpPr>
         <p:spPr>
           <a:xfrm>
-            <a:off x="9015984" y="2734056"/>
-            <a:ext cx="2578607" cy="256032"/>
+            <a:off x="1069848" y="4480559"/>
+            <a:ext cx="2996488" cy="246888"/>
           </a:xfrm>
           <a:prstGeom prst="rect">
             <a:avLst/>
@@ -5106,21 +5254,21 @@
                 </a:solidFill>
                 <a:latin typeface="Calibri"/>
               </a:rPr>
-              <a:t>CloudWatch</a:t>
-            </a:r>
-          </a:p>
-        </p:txBody>
-      </p:sp>
-      <p:sp>
-        <p:nvSpPr>
-          <p:cNvPr id="45" name="TextBox 44"/>
+              <a:t>Fargate</a:t>
+            </a:r>
+          </a:p>
+        </p:txBody>
+      </p:sp>
+      <p:sp>
+        <p:nvSpPr>
+          <p:cNvPr id="49" name="TextBox 48"/>
           <p:cNvSpPr txBox="1"/>
           <p:nvPr/>
         </p:nvSpPr>
         <p:spPr>
           <a:xfrm>
-            <a:off x="9015984" y="3008376"/>
-            <a:ext cx="2578607" cy="310896"/>
+            <a:off x="1069848" y="4736592"/>
+            <a:ext cx="2996488" cy="274320"/>
           </a:xfrm>
           <a:prstGeom prst="rect">
             <a:avLst/>
@@ -5141,25 +5289,25 @@
                 </a:solidFill>
                 <a:latin typeface="Calibri"/>
               </a:rPr>
-              <a:t>one dashboard, both engines</a:t>
-            </a:r>
-          </a:p>
-        </p:txBody>
-      </p:sp>
-      <p:sp>
-        <p:nvSpPr>
-          <p:cNvPr id="46" name="Rounded Rectangle 45"/>
+              <a:t>valentin-ac-proxy-dev</a:t>
+            </a:r>
+          </a:p>
+        </p:txBody>
+      </p:sp>
+      <p:sp>
+        <p:nvSpPr>
+          <p:cNvPr id="50" name="Rounded Rectangle 49"/>
           <p:cNvSpPr/>
           <p:nvPr/>
         </p:nvSpPr>
         <p:spPr>
           <a:xfrm>
-            <a:off x="530352" y="4005072"/>
-            <a:ext cx="3447288" cy="804672"/>
+            <a:off x="4276648" y="4425696"/>
+            <a:ext cx="3664000" cy="621792"/>
           </a:xfrm>
           <a:prstGeom prst="roundRect">
             <a:avLst>
-              <a:gd name="adj" fmla="val 9090"/>
+              <a:gd name="adj" fmla="val 11764"/>
             </a:avLst>
           </a:prstGeom>
           <a:solidFill>
@@ -5196,22 +5344,22 @@
       </p:sp>
       <p:pic>
         <p:nvPicPr>
-          <p:cNvPr id="47" name="Picture 46" descr="Fargate icon"/>
+          <p:cNvPr id="51" name="Picture 50" descr="Runtime icon"/>
           <p:cNvPicPr>
             <a:picLocks noChangeAspect="1"/>
           </p:cNvPicPr>
           <p:nvPr/>
         </p:nvPicPr>
         <p:blipFill>
-          <a:blip r:embed="rId6"/>
+          <a:blip r:embed="rId10"/>
           <a:stretch>
             <a:fillRect/>
           </a:stretch>
         </p:blipFill>
         <p:spPr>
           <a:xfrm>
-            <a:off x="649224" y="4197096"/>
-            <a:ext cx="420624" cy="420624"/>
+            <a:off x="4377232" y="4544568"/>
+            <a:ext cx="384048" cy="384048"/>
           </a:xfrm>
           <a:prstGeom prst="rect">
             <a:avLst/>
@@ -5220,14 +5368,14 @@
       </p:pic>
       <p:sp>
         <p:nvSpPr>
-          <p:cNvPr id="48" name="TextBox 47"/>
+          <p:cNvPr id="52" name="TextBox 51"/>
           <p:cNvSpPr txBox="1"/>
           <p:nvPr/>
         </p:nvSpPr>
         <p:spPr>
           <a:xfrm>
-            <a:off x="1179576" y="4123944"/>
-            <a:ext cx="2706624" cy="256032"/>
+            <a:off x="4861864" y="4480559"/>
+            <a:ext cx="2996488" cy="246888"/>
           </a:xfrm>
           <a:prstGeom prst="rect">
             <a:avLst/>
@@ -5248,21 +5396,21 @@
                 </a:solidFill>
                 <a:latin typeface="Calibri"/>
               </a:rPr>
-              <a:t>Fargate</a:t>
-            </a:r>
-          </a:p>
-        </p:txBody>
-      </p:sp>
-      <p:sp>
-        <p:nvSpPr>
-          <p:cNvPr id="49" name="TextBox 48"/>
+              <a:t>Runtime</a:t>
+            </a:r>
+          </a:p>
+        </p:txBody>
+      </p:sp>
+      <p:sp>
+        <p:nvSpPr>
+          <p:cNvPr id="53" name="TextBox 52"/>
           <p:cNvSpPr txBox="1"/>
           <p:nvPr/>
         </p:nvSpPr>
         <p:spPr>
           <a:xfrm>
-            <a:off x="1179576" y="4398264"/>
-            <a:ext cx="2706624" cy="310896"/>
+            <a:off x="4861864" y="4736592"/>
+            <a:ext cx="2996488" cy="274320"/>
           </a:xfrm>
           <a:prstGeom prst="rect">
             <a:avLst/>
@@ -5283,25 +5431,25 @@
                 </a:solidFill>
                 <a:latin typeface="Calibri"/>
               </a:rPr>
-              <a:t>valentin-ac-proxy-dev</a:t>
-            </a:r>
-          </a:p>
-        </p:txBody>
-      </p:sp>
-      <p:sp>
-        <p:nvSpPr>
-          <p:cNvPr id="50" name="Rounded Rectangle 49"/>
+              <a:t>valentin_agent_dev</a:t>
+            </a:r>
+          </a:p>
+        </p:txBody>
+      </p:sp>
+      <p:sp>
+        <p:nvSpPr>
+          <p:cNvPr id="54" name="Rounded Rectangle 53"/>
           <p:cNvSpPr/>
           <p:nvPr/>
         </p:nvSpPr>
         <p:spPr>
           <a:xfrm>
-            <a:off x="4379976" y="4005072"/>
-            <a:ext cx="3447288" cy="804672"/>
+            <a:off x="8068665" y="4425696"/>
+            <a:ext cx="3664000" cy="621792"/>
           </a:xfrm>
           <a:prstGeom prst="roundRect">
             <a:avLst>
-              <a:gd name="adj" fmla="val 9090"/>
+              <a:gd name="adj" fmla="val 11764"/>
             </a:avLst>
           </a:prstGeom>
           <a:solidFill>
@@ -5338,22 +5486,22 @@
       </p:sp>
       <p:pic>
         <p:nvPicPr>
-          <p:cNvPr id="51" name="Picture 50" descr="Runtime icon"/>
+          <p:cNvPr id="55" name="Picture 54" descr="Memory icon"/>
           <p:cNvPicPr>
             <a:picLocks noChangeAspect="1"/>
           </p:cNvPicPr>
           <p:nvPr/>
         </p:nvPicPr>
         <p:blipFill>
-          <a:blip r:embed="rId10"/>
+          <a:blip r:embed="rId11"/>
           <a:stretch>
             <a:fillRect/>
           </a:stretch>
         </p:blipFill>
         <p:spPr>
           <a:xfrm>
-            <a:off x="4498848" y="4197096"/>
-            <a:ext cx="420624" cy="420624"/>
+            <a:off x="8169249" y="4544568"/>
+            <a:ext cx="384048" cy="384048"/>
           </a:xfrm>
           <a:prstGeom prst="rect">
             <a:avLst/>
@@ -5362,14 +5510,14 @@
       </p:pic>
       <p:sp>
         <p:nvSpPr>
-          <p:cNvPr id="52" name="TextBox 51"/>
+          <p:cNvPr id="56" name="TextBox 55"/>
           <p:cNvSpPr txBox="1"/>
           <p:nvPr/>
         </p:nvSpPr>
         <p:spPr>
           <a:xfrm>
-            <a:off x="5029200" y="4123944"/>
-            <a:ext cx="2706624" cy="256032"/>
+            <a:off x="8653881" y="4480559"/>
+            <a:ext cx="2996488" cy="246888"/>
           </a:xfrm>
           <a:prstGeom prst="rect">
             <a:avLst/>
@@ -5390,21 +5538,21 @@
                 </a:solidFill>
                 <a:latin typeface="Calibri"/>
               </a:rPr>
-              <a:t>Runtime</a:t>
-            </a:r>
-          </a:p>
-        </p:txBody>
-      </p:sp>
-      <p:sp>
-        <p:nvSpPr>
-          <p:cNvPr id="53" name="TextBox 52"/>
+              <a:t>Memory</a:t>
+            </a:r>
+          </a:p>
+        </p:txBody>
+      </p:sp>
+      <p:sp>
+        <p:nvSpPr>
+          <p:cNvPr id="57" name="TextBox 56"/>
           <p:cNvSpPr txBox="1"/>
           <p:nvPr/>
         </p:nvSpPr>
         <p:spPr>
           <a:xfrm>
-            <a:off x="5029200" y="4398264"/>
-            <a:ext cx="2706624" cy="310896"/>
+            <a:off x="8653881" y="4736592"/>
+            <a:ext cx="2996488" cy="274320"/>
           </a:xfrm>
           <a:prstGeom prst="rect">
             <a:avLst/>
@@ -5425,25 +5573,25 @@
                 </a:solidFill>
                 <a:latin typeface="Calibri"/>
               </a:rPr>
-              <a:t>valentin_agent_dev</a:t>
-            </a:r>
-          </a:p>
-        </p:txBody>
-      </p:sp>
-      <p:sp>
-        <p:nvSpPr>
-          <p:cNvPr id="54" name="Rounded Rectangle 53"/>
+              <a:t>valentin_memory_dev</a:t>
+            </a:r>
+          </a:p>
+        </p:txBody>
+      </p:sp>
+      <p:sp>
+        <p:nvSpPr>
+          <p:cNvPr id="58" name="Rounded Rectangle 57"/>
           <p:cNvSpPr/>
           <p:nvPr/>
         </p:nvSpPr>
         <p:spPr>
           <a:xfrm>
-            <a:off x="8229600" y="4005072"/>
-            <a:ext cx="3447288" cy="804672"/>
+            <a:off x="484632" y="5212080"/>
+            <a:ext cx="3664000" cy="621792"/>
           </a:xfrm>
           <a:prstGeom prst="roundRect">
             <a:avLst>
-              <a:gd name="adj" fmla="val 9090"/>
+              <a:gd name="adj" fmla="val 11764"/>
             </a:avLst>
           </a:prstGeom>
           <a:solidFill>
@@ -5480,22 +5628,22 @@
       </p:sp>
       <p:pic>
         <p:nvPicPr>
-          <p:cNvPr id="55" name="Picture 54" descr="Memory icon"/>
+          <p:cNvPr id="59" name="Picture 58" descr="Observability icon"/>
           <p:cNvPicPr>
             <a:picLocks noChangeAspect="1"/>
           </p:cNvPicPr>
           <p:nvPr/>
         </p:nvPicPr>
         <p:blipFill>
-          <a:blip r:embed="rId11"/>
+          <a:blip r:embed="rId12"/>
           <a:stretch>
             <a:fillRect/>
           </a:stretch>
         </p:blipFill>
         <p:spPr>
           <a:xfrm>
-            <a:off x="8348472" y="4197096"/>
-            <a:ext cx="420624" cy="420624"/>
+            <a:off x="585216" y="5330952"/>
+            <a:ext cx="384048" cy="384048"/>
           </a:xfrm>
           <a:prstGeom prst="rect">
             <a:avLst/>
@@ -5504,14 +5652,14 @@
       </p:pic>
       <p:sp>
         <p:nvSpPr>
-          <p:cNvPr id="56" name="TextBox 55"/>
+          <p:cNvPr id="60" name="TextBox 59"/>
           <p:cNvSpPr txBox="1"/>
           <p:nvPr/>
         </p:nvSpPr>
         <p:spPr>
           <a:xfrm>
-            <a:off x="8878824" y="4123944"/>
-            <a:ext cx="2706623" cy="256032"/>
+            <a:off x="1069848" y="5266944"/>
+            <a:ext cx="2996488" cy="246888"/>
           </a:xfrm>
           <a:prstGeom prst="rect">
             <a:avLst/>
@@ -5532,21 +5680,21 @@
                 </a:solidFill>
                 <a:latin typeface="Calibri"/>
               </a:rPr>
-              <a:t>Memory</a:t>
-            </a:r>
-          </a:p>
-        </p:txBody>
-      </p:sp>
-      <p:sp>
-        <p:nvSpPr>
-          <p:cNvPr id="57" name="TextBox 56"/>
+              <a:t>Observability</a:t>
+            </a:r>
+          </a:p>
+        </p:txBody>
+      </p:sp>
+      <p:sp>
+        <p:nvSpPr>
+          <p:cNvPr id="61" name="TextBox 60"/>
           <p:cNvSpPr txBox="1"/>
           <p:nvPr/>
         </p:nvSpPr>
         <p:spPr>
           <a:xfrm>
-            <a:off x="8878824" y="4398264"/>
-            <a:ext cx="2706623" cy="310896"/>
+            <a:off x="1069848" y="5522976"/>
+            <a:ext cx="2996488" cy="274320"/>
           </a:xfrm>
           <a:prstGeom prst="rect">
             <a:avLst/>
@@ -5567,25 +5715,25 @@
                 </a:solidFill>
                 <a:latin typeface="Calibri"/>
               </a:rPr>
-              <a:t>valentin_memory_dev</a:t>
-            </a:r>
-          </a:p>
-        </p:txBody>
-      </p:sp>
-      <p:sp>
-        <p:nvSpPr>
-          <p:cNvPr id="58" name="Rounded Rectangle 57"/>
+              <a:t>session traces</a:t>
+            </a:r>
+          </a:p>
+        </p:txBody>
+      </p:sp>
+      <p:sp>
+        <p:nvSpPr>
+          <p:cNvPr id="62" name="Rounded Rectangle 61"/>
           <p:cNvSpPr/>
           <p:nvPr/>
         </p:nvSpPr>
         <p:spPr>
           <a:xfrm>
-            <a:off x="530352" y="5029200"/>
-            <a:ext cx="3447288" cy="804672"/>
+            <a:off x="4276648" y="5212080"/>
+            <a:ext cx="3664000" cy="621792"/>
           </a:xfrm>
           <a:prstGeom prst="roundRect">
             <a:avLst>
-              <a:gd name="adj" fmla="val 9090"/>
+              <a:gd name="adj" fmla="val 11764"/>
             </a:avLst>
           </a:prstGeom>
           <a:solidFill>
@@ -5622,22 +5770,22 @@
       </p:sp>
       <p:pic>
         <p:nvPicPr>
-          <p:cNvPr id="59" name="Picture 58" descr="Observability icon"/>
+          <p:cNvPr id="63" name="Picture 62" descr="Gateway icon"/>
           <p:cNvPicPr>
             <a:picLocks noChangeAspect="1"/>
           </p:cNvPicPr>
           <p:nvPr/>
         </p:nvPicPr>
         <p:blipFill>
-          <a:blip r:embed="rId12"/>
+          <a:blip r:embed="rId13"/>
           <a:stretch>
             <a:fillRect/>
           </a:stretch>
         </p:blipFill>
         <p:spPr>
           <a:xfrm>
-            <a:off x="649224" y="5221224"/>
-            <a:ext cx="420624" cy="420624"/>
+            <a:off x="4377232" y="5330952"/>
+            <a:ext cx="384048" cy="384048"/>
           </a:xfrm>
           <a:prstGeom prst="rect">
             <a:avLst/>
@@ -5646,14 +5794,14 @@
       </p:pic>
       <p:sp>
         <p:nvSpPr>
-          <p:cNvPr id="60" name="TextBox 59"/>
+          <p:cNvPr id="64" name="TextBox 63"/>
           <p:cNvSpPr txBox="1"/>
           <p:nvPr/>
         </p:nvSpPr>
         <p:spPr>
           <a:xfrm>
-            <a:off x="1179576" y="5148072"/>
-            <a:ext cx="2706624" cy="256032"/>
+            <a:off x="4861864" y="5266944"/>
+            <a:ext cx="2996488" cy="246888"/>
           </a:xfrm>
           <a:prstGeom prst="rect">
             <a:avLst/>
@@ -5674,21 +5822,21 @@
                 </a:solidFill>
                 <a:latin typeface="Calibri"/>
               </a:rPr>
-              <a:t>Observability</a:t>
-            </a:r>
-          </a:p>
-        </p:txBody>
-      </p:sp>
-      <p:sp>
-        <p:nvSpPr>
-          <p:cNvPr id="61" name="TextBox 60"/>
+              <a:t>Gateway</a:t>
+            </a:r>
+          </a:p>
+        </p:txBody>
+      </p:sp>
+      <p:sp>
+        <p:nvSpPr>
+          <p:cNvPr id="65" name="TextBox 64"/>
           <p:cNvSpPr txBox="1"/>
           <p:nvPr/>
         </p:nvSpPr>
         <p:spPr>
           <a:xfrm>
-            <a:off x="1179576" y="5422392"/>
-            <a:ext cx="2706624" cy="310896"/>
+            <a:off x="4861864" y="5522976"/>
+            <a:ext cx="2996488" cy="274320"/>
           </a:xfrm>
           <a:prstGeom prst="rect">
             <a:avLst/>
@@ -5709,25 +5857,25 @@
                 </a:solidFill>
                 <a:latin typeface="Calibri"/>
               </a:rPr>
-              <a:t>session traces</a:t>
-            </a:r>
-          </a:p>
-        </p:txBody>
-      </p:sp>
-      <p:sp>
-        <p:nvSpPr>
-          <p:cNvPr id="62" name="Rounded Rectangle 61"/>
+              <a:t>MCP · CUSTOM_JWT</a:t>
+            </a:r>
+          </a:p>
+        </p:txBody>
+      </p:sp>
+      <p:sp>
+        <p:nvSpPr>
+          <p:cNvPr id="66" name="Rounded Rectangle 65"/>
           <p:cNvSpPr/>
           <p:nvPr/>
         </p:nvSpPr>
         <p:spPr>
           <a:xfrm>
-            <a:off x="4379976" y="5029200"/>
-            <a:ext cx="3447288" cy="804672"/>
+            <a:off x="8068665" y="5212080"/>
+            <a:ext cx="3664000" cy="621792"/>
           </a:xfrm>
           <a:prstGeom prst="roundRect">
             <a:avLst>
-              <a:gd name="adj" fmla="val 9090"/>
+              <a:gd name="adj" fmla="val 11764"/>
             </a:avLst>
           </a:prstGeom>
           <a:solidFill>
@@ -5764,148 +5912,6 @@
       </p:sp>
       <p:pic>
         <p:nvPicPr>
-          <p:cNvPr id="63" name="Picture 62" descr="Gateway icon"/>
-          <p:cNvPicPr>
-            <a:picLocks noChangeAspect="1"/>
-          </p:cNvPicPr>
-          <p:nvPr/>
-        </p:nvPicPr>
-        <p:blipFill>
-          <a:blip r:embed="rId13"/>
-          <a:stretch>
-            <a:fillRect/>
-          </a:stretch>
-        </p:blipFill>
-        <p:spPr>
-          <a:xfrm>
-            <a:off x="4498848" y="5221224"/>
-            <a:ext cx="420624" cy="420624"/>
-          </a:xfrm>
-          <a:prstGeom prst="rect">
-            <a:avLst/>
-          </a:prstGeom>
-        </p:spPr>
-      </p:pic>
-      <p:sp>
-        <p:nvSpPr>
-          <p:cNvPr id="64" name="TextBox 63"/>
-          <p:cNvSpPr txBox="1"/>
-          <p:nvPr/>
-        </p:nvSpPr>
-        <p:spPr>
-          <a:xfrm>
-            <a:off x="5029200" y="5148072"/>
-            <a:ext cx="2706624" cy="256032"/>
-          </a:xfrm>
-          <a:prstGeom prst="rect">
-            <a:avLst/>
-          </a:prstGeom>
-          <a:noFill/>
-        </p:spPr>
-        <p:txBody>
-          <a:bodyPr wrap="square" lIns="0" rIns="0" tIns="0" bIns="0" anchor="t">
-            <a:spAutoFit/>
-          </a:bodyPr>
-          <a:lstStyle/>
-          <a:p>
-            <a:pPr algn="l"/>
-            <a:r>
-              <a:rPr sz="1500" b="1">
-                <a:solidFill>
-                  <a:srgbClr val="232F3E"/>
-                </a:solidFill>
-                <a:latin typeface="Calibri"/>
-              </a:rPr>
-              <a:t>Gateway</a:t>
-            </a:r>
-          </a:p>
-        </p:txBody>
-      </p:sp>
-      <p:sp>
-        <p:nvSpPr>
-          <p:cNvPr id="65" name="TextBox 64"/>
-          <p:cNvSpPr txBox="1"/>
-          <p:nvPr/>
-        </p:nvSpPr>
-        <p:spPr>
-          <a:xfrm>
-            <a:off x="5029200" y="5422392"/>
-            <a:ext cx="2706624" cy="310896"/>
-          </a:xfrm>
-          <a:prstGeom prst="rect">
-            <a:avLst/>
-          </a:prstGeom>
-          <a:noFill/>
-        </p:spPr>
-        <p:txBody>
-          <a:bodyPr wrap="square" lIns="0" rIns="0" tIns="0" bIns="0" anchor="t">
-            <a:spAutoFit/>
-          </a:bodyPr>
-          <a:lstStyle/>
-          <a:p>
-            <a:pPr algn="l"/>
-            <a:r>
-              <a:rPr sz="1400" b="0">
-                <a:solidFill>
-                  <a:srgbClr val="545B64"/>
-                </a:solidFill>
-                <a:latin typeface="Calibri"/>
-              </a:rPr>
-              <a:t>MCP · CUSTOM_JWT</a:t>
-            </a:r>
-          </a:p>
-        </p:txBody>
-      </p:sp>
-      <p:sp>
-        <p:nvSpPr>
-          <p:cNvPr id="66" name="Rounded Rectangle 65"/>
-          <p:cNvSpPr/>
-          <p:nvPr/>
-        </p:nvSpPr>
-        <p:spPr>
-          <a:xfrm>
-            <a:off x="8229600" y="5029200"/>
-            <a:ext cx="3447288" cy="804672"/>
-          </a:xfrm>
-          <a:prstGeom prst="roundRect">
-            <a:avLst>
-              <a:gd name="adj" fmla="val 9090"/>
-            </a:avLst>
-          </a:prstGeom>
-          <a:solidFill>
-            <a:srgbClr val="F7F8FA"/>
-          </a:solidFill>
-          <a:ln w="12700">
-            <a:solidFill>
-              <a:srgbClr val="E4E7EA"/>
-            </a:solidFill>
-          </a:ln>
-          <a:effectLst/>
-        </p:spPr>
-        <p:style>
-          <a:lnRef idx="1">
-            <a:schemeClr val="accent1"/>
-          </a:lnRef>
-          <a:fillRef idx="3">
-            <a:schemeClr val="accent1"/>
-          </a:fillRef>
-          <a:effectRef idx="2">
-            <a:schemeClr val="accent1"/>
-          </a:effectRef>
-          <a:fontRef idx="minor">
-            <a:schemeClr val="lt1"/>
-          </a:fontRef>
-        </p:style>
-        <p:txBody>
-          <a:bodyPr rtlCol="0" anchor="ctr"/>
-          <a:lstStyle/>
-          <a:p>
-            <a:pPr algn="ctr"/>
-          </a:p>
-        </p:txBody>
-      </p:sp>
-      <p:pic>
-        <p:nvPicPr>
           <p:cNvPr id="67" name="Picture 66" descr="Lambda icon"/>
           <p:cNvPicPr>
             <a:picLocks noChangeAspect="1"/>
@@ -5920,8 +5926,8 @@
         </p:blipFill>
         <p:spPr>
           <a:xfrm>
-            <a:off x="8348472" y="5221224"/>
-            <a:ext cx="420624" cy="420624"/>
+            <a:off x="8169249" y="5330952"/>
+            <a:ext cx="384048" cy="384048"/>
           </a:xfrm>
           <a:prstGeom prst="rect">
             <a:avLst/>
@@ -5936,8 +5942,8 @@
         </p:nvSpPr>
         <p:spPr>
           <a:xfrm>
-            <a:off x="8878824" y="5148072"/>
-            <a:ext cx="2706623" cy="256032"/>
+            <a:off x="8653881" y="5266944"/>
+            <a:ext cx="2996488" cy="246888"/>
           </a:xfrm>
           <a:prstGeom prst="rect">
             <a:avLst/>
@@ -5971,8 +5977,8 @@
         </p:nvSpPr>
         <p:spPr>
           <a:xfrm>
-            <a:off x="8878824" y="5422392"/>
-            <a:ext cx="2706623" cy="310896"/>
+            <a:off x="8653881" y="5522976"/>
+            <a:ext cx="2996488" cy="274320"/>
           </a:xfrm>
           <a:prstGeom prst="rect">
             <a:avLst/>
@@ -6042,8 +6048,8 @@
         </p:nvSpPr>
         <p:spPr>
           <a:xfrm>
-            <a:off x="1124712" y="6035040"/>
-            <a:ext cx="2148840" cy="347472"/>
+            <a:off x="1124712" y="6044184"/>
+            <a:ext cx="2148840" cy="329184"/>
           </a:xfrm>
           <a:prstGeom prst="rect">
             <a:avLst/>
@@ -6077,12 +6083,12 @@
         </p:nvSpPr>
         <p:spPr>
           <a:xfrm>
-            <a:off x="3310128" y="6080759"/>
-            <a:ext cx="502920" cy="256032"/>
+            <a:off x="3310128" y="6089904"/>
+            <a:ext cx="502920" cy="237744"/>
           </a:xfrm>
           <a:prstGeom prst="roundRect">
             <a:avLst>
-              <a:gd name="adj" fmla="val 14285"/>
+              <a:gd name="adj" fmla="val 15384"/>
             </a:avLst>
           </a:prstGeom>
           <a:solidFill>
@@ -6126,8 +6132,8 @@
         </p:nvSpPr>
         <p:spPr>
           <a:xfrm>
-            <a:off x="3931920" y="6035040"/>
-            <a:ext cx="2148840" cy="347472"/>
+            <a:off x="3931920" y="6044184"/>
+            <a:ext cx="2148840" cy="329184"/>
           </a:xfrm>
           <a:prstGeom prst="rect">
             <a:avLst/>
@@ -6161,12 +6167,12 @@
         </p:nvSpPr>
         <p:spPr>
           <a:xfrm>
-            <a:off x="6117336" y="6080759"/>
-            <a:ext cx="502920" cy="256032"/>
+            <a:off x="6117336" y="6089904"/>
+            <a:ext cx="502920" cy="237744"/>
           </a:xfrm>
           <a:prstGeom prst="roundRect">
             <a:avLst>
-              <a:gd name="adj" fmla="val 14285"/>
+              <a:gd name="adj" fmla="val 15384"/>
             </a:avLst>
           </a:prstGeom>
           <a:solidFill>
@@ -6210,8 +6216,8 @@
         </p:nvSpPr>
         <p:spPr>
           <a:xfrm>
-            <a:off x="6739127" y="6035040"/>
-            <a:ext cx="2148840" cy="347472"/>
+            <a:off x="6739127" y="6044184"/>
+            <a:ext cx="2148840" cy="329184"/>
           </a:xfrm>
           <a:prstGeom prst="rect">
             <a:avLst/>
@@ -6245,12 +6251,12 @@
         </p:nvSpPr>
         <p:spPr>
           <a:xfrm>
-            <a:off x="8924544" y="6080759"/>
-            <a:ext cx="502920" cy="256032"/>
+            <a:off x="8924544" y="6089904"/>
+            <a:ext cx="502920" cy="237744"/>
           </a:xfrm>
           <a:prstGeom prst="roundRect">
             <a:avLst>
-              <a:gd name="adj" fmla="val 14285"/>
+              <a:gd name="adj" fmla="val 15384"/>
             </a:avLst>
           </a:prstGeom>
           <a:solidFill>
@@ -6293,8 +6299,8 @@
         </p:nvSpPr>
         <p:spPr>
           <a:xfrm>
-            <a:off x="9546336" y="6035040"/>
-            <a:ext cx="2148840" cy="347472"/>
+            <a:off x="9546336" y="6044184"/>
+            <a:ext cx="2148840" cy="329184"/>
           </a:xfrm>
           <a:prstGeom prst="rect">
             <a:avLst/>
@@ -6328,8 +6334,8 @@
         </p:nvCxnSpPr>
         <p:spPr>
           <a:xfrm>
-            <a:off x="2450592" y="1938528"/>
-            <a:ext cx="402336" cy="0"/>
+            <a:off x="2400300" y="1828800"/>
+            <a:ext cx="128016" cy="0"/>
           </a:xfrm>
           <a:prstGeom prst="line">
             <a:avLst/>
@@ -6364,8 +6370,8 @@
         </p:nvCxnSpPr>
         <p:spPr>
           <a:xfrm>
-            <a:off x="3813048" y="2340864"/>
-            <a:ext cx="0" cy="274320"/>
+            <a:off x="3486150" y="2139696"/>
+            <a:ext cx="0" cy="237744"/>
           </a:xfrm>
           <a:prstGeom prst="line">
             <a:avLst/>
@@ -6400,8 +6406,8 @@
         </p:nvCxnSpPr>
         <p:spPr>
           <a:xfrm>
-            <a:off x="3108960" y="2340864"/>
-            <a:ext cx="0" cy="137160"/>
+            <a:off x="2784348" y="2139696"/>
+            <a:ext cx="0" cy="118872"/>
           </a:xfrm>
           <a:prstGeom prst="line">
             <a:avLst/>
@@ -6435,8 +6441,8 @@
         </p:nvCxnSpPr>
         <p:spPr>
           <a:xfrm flipH="1">
-            <a:off x="1490472" y="2478024"/>
-            <a:ext cx="1618488" cy="0"/>
+            <a:off x="1442466" y="2258568"/>
+            <a:ext cx="1341882" cy="0"/>
           </a:xfrm>
           <a:prstGeom prst="line">
             <a:avLst/>
@@ -6470,8 +6476,8 @@
         </p:nvCxnSpPr>
         <p:spPr>
           <a:xfrm>
-            <a:off x="1490472" y="2478024"/>
-            <a:ext cx="0" cy="137160"/>
+            <a:off x="1442466" y="2258568"/>
+            <a:ext cx="0" cy="118872"/>
           </a:xfrm>
           <a:prstGeom prst="line">
             <a:avLst/>
@@ -6506,8 +6512,8 @@
         </p:nvCxnSpPr>
         <p:spPr>
           <a:xfrm>
-            <a:off x="4773168" y="3017520"/>
-            <a:ext cx="246888" cy="0"/>
+            <a:off x="4443984" y="2688336"/>
+            <a:ext cx="164592" cy="0"/>
           </a:xfrm>
           <a:prstGeom prst="line">
             <a:avLst/>
@@ -6541,8 +6547,8 @@
         </p:nvCxnSpPr>
         <p:spPr>
           <a:xfrm flipV="1">
-            <a:off x="5020056" y="1938528"/>
-            <a:ext cx="0" cy="1078992"/>
+            <a:off x="4608576" y="1828800"/>
+            <a:ext cx="0" cy="859536"/>
           </a:xfrm>
           <a:prstGeom prst="line">
             <a:avLst/>
@@ -6576,8 +6582,8 @@
         </p:nvCxnSpPr>
         <p:spPr>
           <a:xfrm>
-            <a:off x="5020056" y="1938528"/>
-            <a:ext cx="210312" cy="0"/>
+            <a:off x="4608576" y="1828800"/>
+            <a:ext cx="164592" cy="0"/>
           </a:xfrm>
           <a:prstGeom prst="line">
             <a:avLst/>
@@ -6612,8 +6618,8 @@
         </p:nvCxnSpPr>
         <p:spPr>
           <a:xfrm>
-            <a:off x="3813048" y="3419856"/>
-            <a:ext cx="0" cy="585216"/>
+            <a:off x="3486150" y="2999232"/>
+            <a:ext cx="0" cy="1325880"/>
           </a:xfrm>
           <a:prstGeom prst="line">
             <a:avLst/>
@@ -6648,8 +6654,8 @@
         </p:nvCxnSpPr>
         <p:spPr>
           <a:xfrm>
-            <a:off x="6588252" y="2340864"/>
-            <a:ext cx="0" cy="274320"/>
+            <a:off x="7671816" y="1737360"/>
+            <a:ext cx="566928" cy="0"/>
           </a:xfrm>
           <a:prstGeom prst="line">
             <a:avLst/>
@@ -6684,8 +6690,8 @@
         </p:nvCxnSpPr>
         <p:spPr>
           <a:xfrm>
-            <a:off x="7946136" y="1938528"/>
-            <a:ext cx="420624" cy="0"/>
+            <a:off x="7498080" y="2139696"/>
+            <a:ext cx="0" cy="1408176"/>
           </a:xfrm>
           <a:prstGeom prst="line">
             <a:avLst/>
@@ -6694,7 +6700,6 @@
             <a:solidFill>
               <a:srgbClr val="FF9900"/>
             </a:solidFill>
-            <a:tailEnd type="triangle" w="med" len="med"/>
           </a:ln>
         </p:spPr>
         <p:style>
@@ -6720,8 +6725,8 @@
         </p:nvCxnSpPr>
         <p:spPr>
           <a:xfrm>
-            <a:off x="3977639" y="4407408"/>
-            <a:ext cx="402337" cy="0"/>
+            <a:off x="7498080" y="3547872"/>
+            <a:ext cx="740664" cy="0"/>
           </a:xfrm>
           <a:prstGeom prst="line">
             <a:avLst/>
@@ -6756,8 +6761,8 @@
         </p:nvCxnSpPr>
         <p:spPr>
           <a:xfrm>
-            <a:off x="7827264" y="4407408"/>
-            <a:ext cx="402336" cy="0"/>
+            <a:off x="4148632" y="4736592"/>
+            <a:ext cx="128016" cy="0"/>
           </a:xfrm>
           <a:prstGeom prst="line">
             <a:avLst/>
@@ -6792,8 +6797,8 @@
         </p:nvCxnSpPr>
         <p:spPr>
           <a:xfrm>
-            <a:off x="7827264" y="4160520"/>
-            <a:ext cx="329184" cy="0"/>
+            <a:off x="7940649" y="4736592"/>
+            <a:ext cx="128016" cy="0"/>
           </a:xfrm>
           <a:prstGeom prst="line">
             <a:avLst/>
@@ -6802,6 +6807,7 @@
             <a:solidFill>
               <a:srgbClr val="FF9900"/>
             </a:solidFill>
+            <a:tailEnd type="triangle" w="med" len="med"/>
           </a:ln>
         </p:spPr>
         <p:style>
@@ -6827,8 +6833,8 @@
         </p:nvCxnSpPr>
         <p:spPr>
           <a:xfrm flipV="1">
-            <a:off x="8156448" y="2148839"/>
-            <a:ext cx="0" cy="2011681"/>
+            <a:off x="7882127" y="1965960"/>
+            <a:ext cx="0" cy="2459736"/>
           </a:xfrm>
           <a:prstGeom prst="line">
             <a:avLst/>
@@ -6862,8 +6868,8 @@
         </p:nvCxnSpPr>
         <p:spPr>
           <a:xfrm>
-            <a:off x="8156448" y="2148839"/>
-            <a:ext cx="210312" cy="0"/>
+            <a:off x="7882127" y="1965960"/>
+            <a:ext cx="356617" cy="0"/>
           </a:xfrm>
           <a:prstGeom prst="line">
             <a:avLst/>
@@ -6898,8 +6904,8 @@
         </p:nvCxnSpPr>
         <p:spPr>
           <a:xfrm>
-            <a:off x="6103620" y="4809744"/>
-            <a:ext cx="0" cy="219456"/>
+            <a:off x="6108649" y="5047488"/>
+            <a:ext cx="0" cy="164592"/>
           </a:xfrm>
           <a:prstGeom prst="line">
             <a:avLst/>
@@ -6934,8 +6940,8 @@
         </p:nvCxnSpPr>
         <p:spPr>
           <a:xfrm>
-            <a:off x="7827264" y="5431536"/>
-            <a:ext cx="402336" cy="0"/>
+            <a:off x="7940649" y="5522976"/>
+            <a:ext cx="128016" cy="0"/>
           </a:xfrm>
           <a:prstGeom prst="line">
             <a:avLst/>
@@ -6969,17 +6975,18 @@
           <p:nvPr/>
         </p:nvCxnSpPr>
         <p:spPr>
-          <a:xfrm flipH="1">
-            <a:off x="4178808" y="4663440"/>
-            <a:ext cx="201168" cy="0"/>
+          <a:xfrm flipV="1">
+            <a:off x="9900666" y="3858768"/>
+            <a:ext cx="0" cy="566928"/>
           </a:xfrm>
           <a:prstGeom prst="line">
             <a:avLst/>
           </a:prstGeom>
-          <a:ln w="19050">
+          <a:ln w="28575">
             <a:solidFill>
-              <a:srgbClr val="545B64"/>
+              <a:srgbClr val="FF9900"/>
             </a:solidFill>
+            <a:tailEnd type="triangle" w="med" len="med"/>
           </a:ln>
         </p:spPr>
         <p:style>
@@ -7004,9 +7011,9 @@
           <p:nvPr/>
         </p:nvCxnSpPr>
         <p:spPr>
-          <a:xfrm>
-            <a:off x="4178808" y="4663440"/>
-            <a:ext cx="0" cy="768096"/>
+          <a:xfrm flipH="1">
+            <a:off x="4148632" y="4901183"/>
+            <a:ext cx="128016" cy="0"/>
           </a:xfrm>
           <a:prstGeom prst="line">
             <a:avLst/>
@@ -7039,9 +7046,44 @@
           <p:nvPr/>
         </p:nvCxnSpPr>
         <p:spPr>
-          <a:xfrm flipH="1">
-            <a:off x="3977639" y="5431536"/>
-            <a:ext cx="201169" cy="0"/>
+          <a:xfrm>
+            <a:off x="4148632" y="4901183"/>
+            <a:ext cx="0" cy="621793"/>
+          </a:xfrm>
+          <a:prstGeom prst="line">
+            <a:avLst/>
+          </a:prstGeom>
+          <a:ln w="19050">
+            <a:solidFill>
+              <a:srgbClr val="545B64"/>
+            </a:solidFill>
+          </a:ln>
+        </p:spPr>
+        <p:style>
+          <a:lnRef idx="2">
+            <a:schemeClr val="accent1"/>
+          </a:lnRef>
+          <a:fillRef idx="0">
+            <a:schemeClr val="accent1"/>
+          </a:fillRef>
+          <a:effectRef idx="1">
+            <a:schemeClr val="accent1"/>
+          </a:effectRef>
+          <a:fontRef idx="minor">
+            <a:schemeClr val="tx1"/>
+          </a:fontRef>
+        </p:style>
+      </p:cxnSp>
+      <p:cxnSp>
+        <p:nvCxnSpPr>
+          <p:cNvPr id="99" name="Connector 98"/>
+          <p:cNvCxnSpPr/>
+          <p:nvPr/>
+        </p:nvCxnSpPr>
+        <p:spPr>
+          <a:xfrm>
+            <a:off x="4148632" y="5522976"/>
+            <a:ext cx="0" cy="0"/>
           </a:xfrm>
           <a:prstGeom prst="line">
             <a:avLst/>
